--- a/docs/presentations/TL1-L1/TL1-L1-Git.pptx
+++ b/docs/presentations/TL1-L1/TL1-L1-Git.pptx
@@ -331,30 +331,42 @@
           <a:lstStyle/>
           <a:p>
             <a:r>
+              <a:rPr dirty="0"/>
               <a:t>[SPOKEN]</a:t>
             </a:r>
           </a:p>
           <a:p>
-            <a:endParaRPr/>
-          </a:p>
-          <a:p>
-            <a:r>
-              <a:t>"Welcome. This is the first TL1 lecture, and it's the most hands-on one you'll get from us — because Git is not something you learn by watching. You learn it by doing it, breaking it, and fixing it. So today you're not going to sit and take notes while I talk about version control. You're going to create a repository, push to it, pull from it, and deliberately crash into a merge conflict and climb back out — all live, on your own machines, following along with us.</a:t>
-            </a:r>
-          </a:p>
-          <a:p>
-            <a:endParaRPr/>
-          </a:p>
-          <a:p>
-            <a:r>
+            <a:endParaRPr dirty="0"/>
+          </a:p>
+          <a:p>
+            <a:r>
+              <a:rPr dirty="0"/>
+              <a:t>"Welcome.</a:t>
+            </a:r>
+            <a:r>
+              <a:rPr lang="en-US" dirty="0"/>
+              <a:t> I’m Adam, one of your TL1s</a:t>
+            </a:r>
+            <a:r>
+              <a:rPr dirty="0"/>
+              <a:t> This is the first TL1 lecture, and it's the most hands-on one you'll get from us — because Git is not something you learn by watching. You learn it by doing it, breaking it, and fixing it. So today you're not going to sit and take notes while I talk about version control. You're going to create a repository, push to it, pull from it, and deliberately crash into a merge conflict and climb back out — all live, on your own machines, following along with us.</a:t>
+            </a:r>
+          </a:p>
+          <a:p>
+            <a:endParaRPr dirty="0"/>
+          </a:p>
+          <a:p>
+            <a:r>
+              <a:rPr dirty="0"/>
               <a:t>By the end of this hour you'll have done every core Git move at least once. That's the goal: not that you've heard of these commands, but that you've run them."</a:t>
             </a:r>
           </a:p>
           <a:p>
-            <a:endParaRPr/>
-          </a:p>
-          <a:p>
-            <a:r>
+            <a:endParaRPr dirty="0"/>
+          </a:p>
+          <a:p>
+            <a:r>
+              <a:rPr dirty="0"/>
               <a:t>[Then to the introductions slide with the whole TL1 group up front.]</a:t>
             </a:r>
           </a:p>
@@ -1949,46 +1961,70 @@
           <a:lstStyle/>
           <a:p>
             <a:r>
+              <a:rPr dirty="0"/>
               <a:t>[SPOKEN — whole TL1 group up front; each says their name so the class can flag them by name.]</a:t>
             </a:r>
           </a:p>
           <a:p>
-            <a:endParaRPr/>
-          </a:p>
-          <a:p>
-            <a:r>
+            <a:endParaRPr dirty="0"/>
+          </a:p>
+          <a:p>
+            <a:r>
+              <a:rPr dirty="0"/>
               <a:t>"First, quick introductions — you'll be calling on us by name all hour."</a:t>
             </a:r>
           </a:p>
           <a:p>
-            <a:endParaRPr/>
-          </a:p>
-          <a:p>
-            <a:r>
-              <a:t>[Each TL1 says name + team.]</a:t>
-            </a:r>
-          </a:p>
-          <a:p>
-            <a:endParaRPr/>
-          </a:p>
-          <a:p>
-            <a:r>
+            <a:endParaRPr dirty="0"/>
+          </a:p>
+          <a:p>
+            <a:r>
+              <a:rPr lang="en-US" dirty="0"/>
+              <a:t>I’m Adam, the voice you’re hearing right now.</a:t>
+            </a:r>
+          </a:p>
+          <a:p>
+            <a:endParaRPr lang="en-US" dirty="0"/>
+          </a:p>
+          <a:p>
+            <a:r>
+              <a:rPr lang="en-US" dirty="0"/>
+              <a:t>In Moscow with me, you have TL1s Breana and Dawson.</a:t>
+            </a:r>
+          </a:p>
+          <a:p>
+            <a:endParaRPr lang="en-US" dirty="0"/>
+          </a:p>
+          <a:p>
+            <a:r>
+              <a:rPr lang="en-US" dirty="0"/>
+              <a:t>In Coeur D Alene, you have TL1 Chris.</a:t>
+            </a:r>
+          </a:p>
+          <a:p>
+            <a:endParaRPr dirty="0"/>
+          </a:p>
+          <a:p>
+            <a:r>
+              <a:rPr dirty="0"/>
               <a:t>"Here's something worth knowing: while one of us presents, the rest are moving around the room to help you get set up. And we are highly motivated to help — each of us needs to log support interactions this semester, and helping you is the easiest way to earn them. So when Git does something confusing — and it will — put your hand up. You're doing us a favor by asking.</a:t>
             </a:r>
           </a:p>
           <a:p>
-            <a:endParaRPr/>
-          </a:p>
-          <a:p>
-            <a:r>
+            <a:endParaRPr dirty="0"/>
+          </a:p>
+          <a:p>
+            <a:r>
+              <a:rPr dirty="0"/>
               <a:t>One more thing, and this is special to TL1: our job doesn't end when this lecture does. During the TL2 lecture, when your team is pushing features to the repo and something goes wrong with a push or a pull or a merge — any TL1 can come help you, and we earn a support credit for it. Normally only the team that's presenting earns those. TL1 is the exception, precisely because Git problems happen to everyone, all semester. So all semester long: if it's a Git problem, grab a TL1. We're looking for the work."</a:t>
             </a:r>
           </a:p>
           <a:p>
-            <a:endParaRPr/>
-          </a:p>
-          <a:p>
-            <a:r>
+            <a:endParaRPr dirty="0"/>
+          </a:p>
+          <a:p>
+            <a:r>
+              <a:rPr dirty="0"/>
               <a:t>[This LEC-for-Git-help exception is also stated in the TL2 deck so the class hears it there too.]</a:t>
             </a:r>
           </a:p>
@@ -9260,6 +9296,47 @@
           </a:p>
         </p:txBody>
       </p:sp>
+      <p:sp>
+        <p:nvSpPr>
+          <p:cNvPr id="11" name="TextBox 10">
+            <a:extLst>
+              <a:ext uri="{FF2B5EF4-FFF2-40B4-BE49-F238E27FC236}">
+                <a16:creationId xmlns:a16="http://schemas.microsoft.com/office/drawing/2014/main" id="{8199A8AF-8894-5EED-FC18-75260DE39EA2}"/>
+              </a:ext>
+            </a:extLst>
+          </p:cNvPr>
+          <p:cNvSpPr txBox="1"/>
+          <p:nvPr/>
+        </p:nvSpPr>
+        <p:spPr>
+          <a:xfrm>
+            <a:off x="457200" y="6583362"/>
+            <a:ext cx="2500010" cy="369332"/>
+          </a:xfrm>
+          <a:prstGeom prst="rect">
+            <a:avLst/>
+          </a:prstGeom>
+          <a:noFill/>
+        </p:spPr>
+        <p:txBody>
+          <a:bodyPr wrap="square" lIns="91440" tIns="45720" rIns="91440" bIns="45720" rtlCol="0" anchor="t">
+            <a:spAutoFit/>
+          </a:bodyPr>
+          <a:lstStyle/>
+          <a:p>
+            <a:r>
+              <a:rPr lang="en-US" dirty="0">
+                <a:solidFill>
+                  <a:schemeClr val="bg1"/>
+                </a:solidFill>
+                <a:ea typeface="Calibri"/>
+                <a:cs typeface="Calibri"/>
+              </a:rPr>
+              <a:t>Adam</a:t>
+            </a:r>
+          </a:p>
+        </p:txBody>
+      </p:sp>
     </p:spTree>
     <p:extLst>
       <p:ext uri="{BB962C8B-B14F-4D97-AF65-F5344CB8AC3E}">
@@ -10032,7 +10109,7 @@
         </p:nvSpPr>
         <p:spPr>
           <a:xfrm>
-            <a:off x="457200" y="6673334"/>
+            <a:off x="457200" y="6583362"/>
             <a:ext cx="2500010" cy="369332"/>
           </a:xfrm>
           <a:prstGeom prst="rect">
@@ -10047,7 +10124,7 @@
           <a:lstStyle/>
           <a:p>
             <a:r>
-              <a:rPr lang="en-US">
+              <a:rPr lang="en-US" dirty="0">
                 <a:solidFill>
                   <a:schemeClr val="bg1"/>
                 </a:solidFill>
@@ -10157,7 +10234,7 @@
         </p:nvSpPr>
         <p:spPr>
           <a:xfrm>
-            <a:off x="457200" y="6673334"/>
+            <a:off x="457200" y="6583362"/>
             <a:ext cx="2500010" cy="369332"/>
           </a:xfrm>
           <a:prstGeom prst="rect">
@@ -10172,7 +10249,7 @@
           <a:lstStyle/>
           <a:p>
             <a:r>
-              <a:rPr lang="en-US">
+              <a:rPr lang="en-US" dirty="0">
                 <a:solidFill>
                   <a:schemeClr val="bg1"/>
                 </a:solidFill>
